--- a/ppt_build/SIH2026_PS26228_cvassure.pptx
+++ b/ppt_build/SIH2026_PS26228_cvassure.pptx
@@ -7722,7 +7722,7 @@
                 </a:solidFill>
                 <a:latin typeface="Cambria"/>
               </a:rPr>
-              <a:t>273</a:t>
+              <a:t>301</a:t>
             </a:r>
           </a:p>
         </p:txBody>
@@ -7783,7 +7783,7 @@
                 </a:solidFill>
                 <a:latin typeface="Calibri"/>
               </a:rPr>
-              <a:t>225 measured cells</a:t>
+              <a:t>270 measured cells</a:t>
             </a:r>
           </a:p>
         </p:txBody>
@@ -7825,7 +7825,7 @@
                 </a:solidFill>
                 <a:latin typeface="Calibri"/>
               </a:rPr>
-              <a:t>Measured over 225 swept cells (5 attacks × 5 poison rates × 3 access tiers × 3 seeds) plus 12 tampering attempts — graded on the median cell, never the best.</a:t>
+              <a:t>Measured over 270 swept cells (6 attacks × 5 poison rates × 3 access tiers × 3 seeds) plus 12 tampering attempts — graded on the median cell, never the best.</a:t>
             </a:r>
           </a:p>
         </p:txBody>
@@ -11602,7 +11602,7 @@
                 </a:solidFill>
                 <a:latin typeface="Cambria"/>
               </a:rPr>
-              <a:t>Measured, not asserted — 225 cells, 3 seeds each</a:t>
+              <a:t>Measured, not asserted — 270 cells, 3 seeds each</a:t>
             </a:r>
           </a:p>
         </p:txBody>
@@ -11902,7 +11902,7 @@
                 </a:solidFill>
                 <a:latin typeface="Calibri"/>
               </a:rPr>
-              <a:t> Not a concept — 273 tests, 225 swept cells, four results tables.</a:t>
+              <a:t> Not a concept — 301 tests, 270 swept cells, four results tables.</a:t>
             </a:r>
           </a:p>
           <a:p>
@@ -12454,7 +12454,7 @@
         </p:nvGraphicFramePr>
         <p:xfrm>
           <a:off x="329184" y="5120640"/>
-          <a:ext cx="11530583" cy="1056132"/>
+          <a:ext cx="11530583" cy="1111904"/>
         </p:xfrm>
         <a:graphic>
           <a:graphicData uri="http://schemas.openxmlformats.org/drawingml/2006/table">
@@ -12469,7 +12469,7 @@
                 <a:gridCol w="1508760"/>
                 <a:gridCol w="2066543"/>
               </a:tblGrid>
-              <a:tr h="150876">
+              <a:tr h="138988">
                 <a:tc>
                   <a:txBody>
                     <a:bodyPr wrap="none"/>
@@ -12586,7 +12586,7 @@
                   </a:tcPr>
                 </a:tc>
               </a:tr>
-              <a:tr h="150876">
+              <a:tr h="138988">
                 <a:tc>
                   <a:txBody>
                     <a:bodyPr wrap="none"/>
@@ -12703,7 +12703,7 @@
                   </a:tcPr>
                 </a:tc>
               </a:tr>
-              <a:tr h="150876">
+              <a:tr h="138988">
                 <a:tc>
                   <a:txBody>
                     <a:bodyPr wrap="none"/>
@@ -12820,7 +12820,124 @@
                   </a:tcPr>
                 </a:tc>
               </a:tr>
-              <a:tr h="150876">
+              <a:tr h="138988">
+                <a:tc>
+                  <a:txBody>
+                    <a:bodyPr wrap="none"/>
+                    <a:lstStyle/>
+                    <a:p>
+                      <a:pPr algn="l"/>
+                      <a:r>
+                        <a:rPr sz="960" b="0" i="0">
+                          <a:solidFill>
+                            <a:srgbClr val="1A1A1A"/>
+                          </a:solidFill>
+                          <a:latin typeface="Calibri"/>
+                        </a:rPr>
+                        <a:t>One contributor mislabels systematically</a:t>
+                      </a:r>
+                    </a:p>
+                  </a:txBody>
+                  <a:tcPr marL="54864" marR="36576" marT="0" marB="0" anchor="ctr">
+                    <a:solidFill>
+                      <a:srgbClr val="FFFFFF"/>
+                    </a:solidFill>
+                  </a:tcPr>
+                </a:tc>
+                <a:tc>
+                  <a:txBody>
+                    <a:bodyPr wrap="none"/>
+                    <a:lstStyle/>
+                    <a:p>
+                      <a:pPr algn="ctr"/>
+                      <a:r>
+                        <a:rPr sz="960" b="1" i="0">
+                          <a:solidFill>
+                            <a:srgbClr val="1A1A1A"/>
+                          </a:solidFill>
+                          <a:latin typeface="Calibri"/>
+                        </a:rPr>
+                        <a:t>1.00</a:t>
+                      </a:r>
+                    </a:p>
+                  </a:txBody>
+                  <a:tcPr marL="54864" marR="36576" marT="0" marB="0" anchor="ctr">
+                    <a:solidFill>
+                      <a:srgbClr val="FFFFFF"/>
+                    </a:solidFill>
+                  </a:tcPr>
+                </a:tc>
+                <a:tc>
+                  <a:txBody>
+                    <a:bodyPr wrap="none"/>
+                    <a:lstStyle/>
+                    <a:p>
+                      <a:pPr algn="ctr"/>
+                      <a:r>
+                        <a:rPr sz="960" b="0" i="0">
+                          <a:solidFill>
+                            <a:srgbClr val="1A1A1A"/>
+                          </a:solidFill>
+                          <a:latin typeface="Calibri"/>
+                        </a:rPr>
+                        <a:t>0.01 – 1.00</a:t>
+                      </a:r>
+                    </a:p>
+                  </a:txBody>
+                  <a:tcPr marL="54864" marR="36576" marT="0" marB="0" anchor="ctr">
+                    <a:solidFill>
+                      <a:srgbClr val="FFFFFF"/>
+                    </a:solidFill>
+                  </a:tcPr>
+                </a:tc>
+                <a:tc>
+                  <a:txBody>
+                    <a:bodyPr wrap="none"/>
+                    <a:lstStyle/>
+                    <a:p>
+                      <a:pPr algn="ctr"/>
+                      <a:r>
+                        <a:rPr sz="960" b="0" i="0">
+                          <a:solidFill>
+                            <a:srgbClr val="1A1A1A"/>
+                          </a:solidFill>
+                          <a:latin typeface="Calibri"/>
+                        </a:rPr>
+                        <a:t>1.0%</a:t>
+                      </a:r>
+                    </a:p>
+                  </a:txBody>
+                  <a:tcPr marL="54864" marR="36576" marT="0" marB="0" anchor="ctr">
+                    <a:solidFill>
+                      <a:srgbClr val="FFFFFF"/>
+                    </a:solidFill>
+                  </a:tcPr>
+                </a:tc>
+                <a:tc>
+                  <a:txBody>
+                    <a:bodyPr wrap="none"/>
+                    <a:lstStyle/>
+                    <a:p>
+                      <a:pPr algn="ctr"/>
+                      <a:r>
+                        <a:rPr sz="960" b="1" i="0">
+                          <a:solidFill>
+                            <a:srgbClr val="1A7F4B"/>
+                          </a:solidFill>
+                          <a:latin typeface="Calibri"/>
+                        </a:rPr>
+                        <a:t>strong</a:t>
+                      </a:r>
+                    </a:p>
+                  </a:txBody>
+                  <a:tcPr marL="54864" marR="36576" marT="0" marB="0" anchor="ctr">
+                    <a:solidFill>
+                      <a:srgbClr val="FFFFFF"/>
+                    </a:solidFill>
+                  </a:tcPr>
+                </a:tc>
+              </a:tr>
+              <a:tr h="138988">
                 <a:tc>
                   <a:txBody>
                     <a:bodyPr wrap="none"/>
@@ -12835,6 +12952,123 @@
                           <a:latin typeface="Calibri"/>
                         </a:rPr>
                         <a:t>A marker pasted onto the image</a:t>
+                      </a:r>
+                    </a:p>
+                  </a:txBody>
+                  <a:tcPr marL="54864" marR="36576" marT="0" marB="0" anchor="ctr">
+                    <a:solidFill>
+                      <a:srgbClr val="EEF2F6"/>
+                    </a:solidFill>
+                  </a:tcPr>
+                </a:tc>
+                <a:tc>
+                  <a:txBody>
+                    <a:bodyPr wrap="none"/>
+                    <a:lstStyle/>
+                    <a:p>
+                      <a:pPr algn="ctr"/>
+                      <a:r>
+                        <a:rPr sz="960" b="1" i="0">
+                          <a:solidFill>
+                            <a:srgbClr val="1A1A1A"/>
+                          </a:solidFill>
+                          <a:latin typeface="Calibri"/>
+                        </a:rPr>
+                        <a:t>0.93</a:t>
+                      </a:r>
+                    </a:p>
+                  </a:txBody>
+                  <a:tcPr marL="54864" marR="36576" marT="0" marB="0" anchor="ctr">
+                    <a:solidFill>
+                      <a:srgbClr val="EEF2F6"/>
+                    </a:solidFill>
+                  </a:tcPr>
+                </a:tc>
+                <a:tc>
+                  <a:txBody>
+                    <a:bodyPr wrap="none"/>
+                    <a:lstStyle/>
+                    <a:p>
+                      <a:pPr algn="ctr"/>
+                      <a:r>
+                        <a:rPr sz="960" b="0" i="0">
+                          <a:solidFill>
+                            <a:srgbClr val="1A1A1A"/>
+                          </a:solidFill>
+                          <a:latin typeface="Calibri"/>
+                        </a:rPr>
+                        <a:t>0.67 – 1.00</a:t>
+                      </a:r>
+                    </a:p>
+                  </a:txBody>
+                  <a:tcPr marL="54864" marR="36576" marT="0" marB="0" anchor="ctr">
+                    <a:solidFill>
+                      <a:srgbClr val="EEF2F6"/>
+                    </a:solidFill>
+                  </a:tcPr>
+                </a:tc>
+                <a:tc>
+                  <a:txBody>
+                    <a:bodyPr wrap="none"/>
+                    <a:lstStyle/>
+                    <a:p>
+                      <a:pPr algn="ctr"/>
+                      <a:r>
+                        <a:rPr sz="960" b="0" i="0">
+                          <a:solidFill>
+                            <a:srgbClr val="1A1A1A"/>
+                          </a:solidFill>
+                          <a:latin typeface="Calibri"/>
+                        </a:rPr>
+                        <a:t>1.7%</a:t>
+                      </a:r>
+                    </a:p>
+                  </a:txBody>
+                  <a:tcPr marL="54864" marR="36576" marT="0" marB="0" anchor="ctr">
+                    <a:solidFill>
+                      <a:srgbClr val="EEF2F6"/>
+                    </a:solidFill>
+                  </a:tcPr>
+                </a:tc>
+                <a:tc>
+                  <a:txBody>
+                    <a:bodyPr wrap="none"/>
+                    <a:lstStyle/>
+                    <a:p>
+                      <a:pPr algn="ctr"/>
+                      <a:r>
+                        <a:rPr sz="960" b="1" i="0">
+                          <a:solidFill>
+                            <a:srgbClr val="1A7F4B"/>
+                          </a:solidFill>
+                          <a:latin typeface="Calibri"/>
+                        </a:rPr>
+                        <a:t>strong</a:t>
+                      </a:r>
+                    </a:p>
+                  </a:txBody>
+                  <a:tcPr marL="54864" marR="36576" marT="0" marB="0" anchor="ctr">
+                    <a:solidFill>
+                      <a:srgbClr val="EEF2F6"/>
+                    </a:solidFill>
+                  </a:tcPr>
+                </a:tc>
+              </a:tr>
+              <a:tr h="138988">
+                <a:tc>
+                  <a:txBody>
+                    <a:bodyPr wrap="none"/>
+                    <a:lstStyle/>
+                    <a:p>
+                      <a:pPr algn="l"/>
+                      <a:r>
+                        <a:rPr sz="960" b="0" i="0">
+                          <a:solidFill>
+                            <a:srgbClr val="1A1A1A"/>
+                          </a:solidFill>
+                          <a:latin typeface="Calibri"/>
+                        </a:rPr>
+                        <a:t>The picture is fine, the label is wrong</a:t>
                       </a:r>
                     </a:p>
                   </a:txBody>
@@ -12880,7 +13114,7 @@
                           </a:solidFill>
                           <a:latin typeface="Calibri"/>
                         </a:rPr>
-                        <a:t>0.67 – 1.00</a:t>
+                        <a:t>0.83 – 1.00</a:t>
                       </a:r>
                     </a:p>
                   </a:txBody>
@@ -12903,7 +13137,7 @@
                           </a:solidFill>
                           <a:latin typeface="Calibri"/>
                         </a:rPr>
-                        <a:t>1.7%</a:t>
+                        <a:t>1.0%</a:t>
                       </a:r>
                     </a:p>
                   </a:txBody>
@@ -12937,124 +13171,7 @@
                   </a:tcPr>
                 </a:tc>
               </a:tr>
-              <a:tr h="150876">
-                <a:tc>
-                  <a:txBody>
-                    <a:bodyPr wrap="none"/>
-                    <a:lstStyle/>
-                    <a:p>
-                      <a:pPr algn="l"/>
-                      <a:r>
-                        <a:rPr sz="960" b="0" i="0">
-                          <a:solidFill>
-                            <a:srgbClr val="1A1A1A"/>
-                          </a:solidFill>
-                          <a:latin typeface="Calibri"/>
-                        </a:rPr>
-                        <a:t>The picture is fine, the label is wrong</a:t>
-                      </a:r>
-                    </a:p>
-                  </a:txBody>
-                  <a:tcPr marL="54864" marR="36576" marT="0" marB="0" anchor="ctr">
-                    <a:solidFill>
-                      <a:srgbClr val="EEF2F6"/>
-                    </a:solidFill>
-                  </a:tcPr>
-                </a:tc>
-                <a:tc>
-                  <a:txBody>
-                    <a:bodyPr wrap="none"/>
-                    <a:lstStyle/>
-                    <a:p>
-                      <a:pPr algn="ctr"/>
-                      <a:r>
-                        <a:rPr sz="960" b="1" i="0">
-                          <a:solidFill>
-                            <a:srgbClr val="1A1A1A"/>
-                          </a:solidFill>
-                          <a:latin typeface="Calibri"/>
-                        </a:rPr>
-                        <a:t>0.93</a:t>
-                      </a:r>
-                    </a:p>
-                  </a:txBody>
-                  <a:tcPr marL="54864" marR="36576" marT="0" marB="0" anchor="ctr">
-                    <a:solidFill>
-                      <a:srgbClr val="EEF2F6"/>
-                    </a:solidFill>
-                  </a:tcPr>
-                </a:tc>
-                <a:tc>
-                  <a:txBody>
-                    <a:bodyPr wrap="none"/>
-                    <a:lstStyle/>
-                    <a:p>
-                      <a:pPr algn="ctr"/>
-                      <a:r>
-                        <a:rPr sz="960" b="0" i="0">
-                          <a:solidFill>
-                            <a:srgbClr val="1A1A1A"/>
-                          </a:solidFill>
-                          <a:latin typeface="Calibri"/>
-                        </a:rPr>
-                        <a:t>0.83 – 1.00</a:t>
-                      </a:r>
-                    </a:p>
-                  </a:txBody>
-                  <a:tcPr marL="54864" marR="36576" marT="0" marB="0" anchor="ctr">
-                    <a:solidFill>
-                      <a:srgbClr val="EEF2F6"/>
-                    </a:solidFill>
-                  </a:tcPr>
-                </a:tc>
-                <a:tc>
-                  <a:txBody>
-                    <a:bodyPr wrap="none"/>
-                    <a:lstStyle/>
-                    <a:p>
-                      <a:pPr algn="ctr"/>
-                      <a:r>
-                        <a:rPr sz="960" b="0" i="0">
-                          <a:solidFill>
-                            <a:srgbClr val="1A1A1A"/>
-                          </a:solidFill>
-                          <a:latin typeface="Calibri"/>
-                        </a:rPr>
-                        <a:t>1.0%</a:t>
-                      </a:r>
-                    </a:p>
-                  </a:txBody>
-                  <a:tcPr marL="54864" marR="36576" marT="0" marB="0" anchor="ctr">
-                    <a:solidFill>
-                      <a:srgbClr val="EEF2F6"/>
-                    </a:solidFill>
-                  </a:tcPr>
-                </a:tc>
-                <a:tc>
-                  <a:txBody>
-                    <a:bodyPr wrap="none"/>
-                    <a:lstStyle/>
-                    <a:p>
-                      <a:pPr algn="ctr"/>
-                      <a:r>
-                        <a:rPr sz="960" b="1" i="0">
-                          <a:solidFill>
-                            <a:srgbClr val="1A7F4B"/>
-                          </a:solidFill>
-                          <a:latin typeface="Calibri"/>
-                        </a:rPr>
-                        <a:t>strong</a:t>
-                      </a:r>
-                    </a:p>
-                  </a:txBody>
-                  <a:tcPr marL="54864" marR="36576" marT="0" marB="0" anchor="ctr">
-                    <a:solidFill>
-                      <a:srgbClr val="EEF2F6"/>
-                    </a:solidFill>
-                  </a:tcPr>
-                </a:tc>
-              </a:tr>
-              <a:tr h="150876">
+              <a:tr h="138988">
                 <a:tc>
                   <a:txBody>
                     <a:bodyPr wrap="none"/>
@@ -13171,7 +13288,7 @@
                   </a:tcPr>
                 </a:tc>
               </a:tr>
-              <a:tr h="150876">
+              <a:tr h="138988">
                 <a:tc>
                   <a:txBody>
                     <a:bodyPr wrap="none"/>
@@ -13191,7 +13308,7 @@
                   </a:txBody>
                   <a:tcPr marL="54864" marR="36576" marT="0" marB="0" anchor="ctr">
                     <a:solidFill>
-                      <a:srgbClr val="EEF2F6"/>
+                      <a:srgbClr val="FFFFFF"/>
                     </a:solidFill>
                   </a:tcPr>
                 </a:tc>
@@ -13214,7 +13331,7 @@
                   </a:txBody>
                   <a:tcPr marL="54864" marR="36576" marT="0" marB="0" anchor="ctr">
                     <a:solidFill>
-                      <a:srgbClr val="EEF2F6"/>
+                      <a:srgbClr val="FFFFFF"/>
                     </a:solidFill>
                   </a:tcPr>
                 </a:tc>
@@ -13237,7 +13354,7 @@
                   </a:txBody>
                   <a:tcPr marL="54864" marR="36576" marT="0" marB="0" anchor="ctr">
                     <a:solidFill>
-                      <a:srgbClr val="EEF2F6"/>
+                      <a:srgbClr val="FFFFFF"/>
                     </a:solidFill>
                   </a:tcPr>
                 </a:tc>
@@ -13260,7 +13377,7 @@
                   </a:txBody>
                   <a:tcPr marL="54864" marR="36576" marT="0" marB="0" anchor="ctr">
                     <a:solidFill>
-                      <a:srgbClr val="EEF2F6"/>
+                      <a:srgbClr val="FFFFFF"/>
                     </a:solidFill>
                   </a:tcPr>
                 </a:tc>
@@ -13283,7 +13400,7 @@
                   </a:txBody>
                   <a:tcPr marL="54864" marR="36576" marT="0" marB="0" anchor="ctr">
                     <a:solidFill>
-                      <a:srgbClr val="EEF2F6"/>
+                      <a:srgbClr val="FFFFFF"/>
                     </a:solidFill>
                   </a:tcPr>
                 </a:tc>
@@ -16434,7 +16551,7 @@
                 </a:solidFill>
                 <a:latin typeface="Calibri"/>
               </a:rPr>
-              <a:t>  runs 273 tests plus the assertion that nothing touched the network.</a:t>
+              <a:t>  runs 301 tests plus the assertion that nothing touched the network.</a:t>
             </a:r>
           </a:p>
           <a:p>

--- a/ppt_build/SIH2026_PS26228_cvassure.pptx
+++ b/ppt_build/SIH2026_PS26228_cvassure.pptx
@@ -7722,7 +7722,7 @@
                 </a:solidFill>
                 <a:latin typeface="Cambria"/>
               </a:rPr>
-              <a:t>301</a:t>
+              <a:t>302</a:t>
             </a:r>
           </a:p>
         </p:txBody>
@@ -11902,7 +11902,7 @@
                 </a:solidFill>
                 <a:latin typeface="Calibri"/>
               </a:rPr>
-              <a:t> Not a concept — 301 tests, 270 swept cells, four results tables.</a:t>
+              <a:t> Not a concept — 302 tests, 270 swept cells, four results tables.</a:t>
             </a:r>
           </a:p>
           <a:p>
@@ -16551,7 +16551,7 @@
                 </a:solidFill>
                 <a:latin typeface="Calibri"/>
               </a:rPr>
-              <a:t>  runs 301 tests plus the assertion that nothing touched the network.</a:t>
+              <a:t>  runs 302 tests plus the assertion that nothing touched the network.</a:t>
             </a:r>
           </a:p>
           <a:p>

--- a/ppt_build/SIH2026_PS26228_cvassure.pptx
+++ b/ppt_build/SIH2026_PS26228_cvassure.pptx
@@ -13889,7 +13889,7 @@
         <p:spPr>
           <a:xfrm>
             <a:off x="329184" y="1371600"/>
-            <a:ext cx="5897880" cy="858695"/>
+            <a:ext cx="5577840" cy="906887"/>
           </a:xfrm>
           <a:prstGeom prst="rect">
             <a:avLst/>
@@ -13904,7 +13904,7 @@
         </p:nvSpPr>
         <p:spPr>
           <a:xfrm>
-            <a:off x="329184" y="2304288"/>
+            <a:off x="329184" y="2313432"/>
             <a:ext cx="5897880" cy="256032"/>
           </a:xfrm>
           <a:prstGeom prst="rect">
@@ -13933,7 +13933,7 @@
                 </a:solidFill>
                 <a:latin typeface="Calibri"/>
               </a:rPr>
-              <a:t>Real output. One offline HTML file — no dashboard to host, nothing to install on the analyst's machine.</a:t>
+              <a:t>Real output from one command on one contaminated intake. Every figure on this slide is that same run.</a:t>
             </a:r>
           </a:p>
         </p:txBody>
@@ -13999,7 +13999,7 @@
         <p:spPr>
           <a:xfrm>
             <a:off x="448056" y="2706624"/>
-            <a:ext cx="2737001" cy="1965960"/>
+            <a:ext cx="2716197" cy="1965960"/>
           </a:xfrm>
           <a:prstGeom prst="rect">
             <a:avLst/>
@@ -14109,7 +14109,7 @@
         <p:spPr>
           <a:xfrm>
             <a:off x="3520440" y="2706624"/>
-            <a:ext cx="2961482" cy="1965960"/>
+            <a:ext cx="3016814" cy="1965960"/>
           </a:xfrm>
           <a:prstGeom prst="rect">
             <a:avLst/>
@@ -14153,7 +14153,7 @@
                 </a:solidFill>
                 <a:latin typeface="Calibri"/>
               </a:rPr>
-              <a:t>What we did, against what was true.</a:t>
+              <a:t>21 poisoned images: 18 caught, 3 missed.</a:t>
             </a:r>
           </a:p>
         </p:txBody>
@@ -14276,7 +14276,7 @@
                 </a:solidFill>
                 <a:latin typeface="Calibri"/>
               </a:rPr>
-              <a:t>one line — quarantine Contributor C3, whose true poison rate was 51% and whom we scored 45% with a 36–54% interval.</a:t>
+              <a:t>one line — quarantine Contributor C3, whose true poison rate was 51% and whom we scored 45% with a 36–54% interval. All 3 bad actors caught; 1 clean source over-flagged for review, never quarantined.</a:t>
             </a:r>
           </a:p>
         </p:txBody>
